--- a/[완성본] 2026년 산학프로젝트 포스터.pptx
+++ b/[완성본] 2026년 산학프로젝트 포스터.pptx
@@ -3097,21 +3097,8 @@
           <a:bodyPr rtlCol="0" anchor="ctr"/>
           <a:lstStyle/>
           <a:p>
-            <a:pPr algn="ctr"/>
-            <a:r>
-              <a:rPr lang="ko-KR" altLang="en-US" sz="4800" b="1" dirty="0">
-                <a:ln w="6350">
-                  <a:solidFill>
-                    <a:schemeClr val="bg1"/>
-                  </a:solidFill>
-                </a:ln>
-                <a:solidFill>
-                  <a:schemeClr val="bg1"/>
-                </a:solidFill>
-                <a:latin typeface="맑은 고딕" panose="020B0503020000020004" pitchFamily="50" charset="-127"/>
-                <a:ea typeface="맑은 고딕" panose="020B0503020000020004" pitchFamily="50" charset="-127"/>
-              </a:rPr>
-              <a:t>프로젝트 제작동기</a:t>
+            <a:r>
+              <a:t>AI 기반 비대칭 S-Curve 궤적 최적화 및 인풋쉐이핑을 활용한 반도체 픽앤플레이스 갠트리 진동 억제 시스템</a:t>
             </a:r>
           </a:p>
         </p:txBody>
@@ -3165,21 +3152,183 @@
           <a:bodyPr rtlCol="0" anchor="ctr"/>
           <a:lstStyle/>
           <a:p>
-            <a:pPr algn="ctr"/>
-            <a:r>
-              <a:rPr lang="ko-KR" altLang="en-US" sz="4800" b="1" dirty="0">
-                <a:ln w="6350">
-                  <a:solidFill>
-                    <a:schemeClr val="bg1"/>
-                  </a:solidFill>
-                </a:ln>
-                <a:solidFill>
-                  <a:schemeClr val="bg1"/>
-                </a:solidFill>
-                <a:latin typeface="맑은 고딕" panose="020B0503020000020004" pitchFamily="50" charset="-127"/>
-                <a:ea typeface="맑은 고딕" panose="020B0503020000020004" pitchFamily="50" charset="-127"/>
-              </a:rPr>
-              <a:t>프로젝트 내용</a:t>
+            <a:pPr>
+              <a:defRPr sz="1800"/>
+            </a:pPr>
+            <a:r>
+              <a:rPr lang="ko-KR" altLang="en-US" b="1" sz="1800"/>
+              <a:t>■ 1. 연구 배경</a:t>
+            </a:r>
+          </a:p>
+          <a:p>
+            <a:pPr>
+              <a:defRPr sz="1800"/>
+            </a:pPr>
+            <a:r>
+              <a:rPr lang="ko-KR" altLang="en-US"/>
+              <a:t/>
+            </a:r>
+          </a:p>
+          <a:p>
+            <a:pPr>
+              <a:defRPr sz="1800"/>
+            </a:pPr>
+            <a:r>
+              <a:rPr lang="ko-KR" altLang="en-US" sz="1600"/>
+              <a:t>• 반도체 Pick &amp; Place 공정에서 갠트리 고속 이동 시 잔류 진동 발생</a:t>
+            </a:r>
+          </a:p>
+          <a:p>
+            <a:pPr>
+              <a:defRPr sz="1800"/>
+            </a:pPr>
+            <a:r>
+              <a:rPr lang="ko-KR" altLang="en-US" sz="1600"/>
+              <a:t>• 진동이 정착될 때까지 대기 → UPH(생산성) 저하의 직접적 원인</a:t>
+            </a:r>
+          </a:p>
+          <a:p>
+            <a:pPr>
+              <a:defRPr sz="1800"/>
+            </a:pPr>
+            <a:r>
+              <a:rPr lang="ko-KR" altLang="en-US" sz="1600"/>
+              <a:t>• 해결: 모션 프로파일 최적화 + 인풋쉐이핑(ZVD)으로 진동 원천 억제</a:t>
+            </a:r>
+          </a:p>
+          <a:p>
+            <a:pPr>
+              <a:defRPr sz="1800"/>
+            </a:pPr>
+            <a:r>
+              <a:rPr lang="ko-KR" altLang="en-US"/>
+              <a:t/>
+            </a:r>
+          </a:p>
+          <a:p>
+            <a:pPr>
+              <a:defRPr sz="1800"/>
+            </a:pPr>
+            <a:r>
+              <a:rPr lang="ko-KR" altLang="en-US"/>
+              <a:t/>
+            </a:r>
+          </a:p>
+          <a:p>
+            <a:pPr>
+              <a:defRPr sz="1800"/>
+            </a:pPr>
+            <a:r>
+              <a:rPr lang="ko-KR" altLang="en-US" b="1" sz="1800"/>
+              <a:t>■ 2. 시스템 모델</a:t>
+            </a:r>
+          </a:p>
+          <a:p>
+            <a:pPr>
+              <a:defRPr sz="1800"/>
+            </a:pPr>
+            <a:r>
+              <a:rPr lang="ko-KR" altLang="en-US"/>
+              <a:t/>
+            </a:r>
+          </a:p>
+          <a:p>
+            <a:pPr>
+              <a:defRPr sz="1800"/>
+            </a:pPr>
+            <a:r>
+              <a:rPr lang="ko-KR" altLang="en-US" sz="1600"/>
+              <a:t>• 2-Mass Model: Motor(Perfect Servo) → Spring-Damper → Load</a:t>
+            </a:r>
+          </a:p>
+          <a:p>
+            <a:pPr>
+              <a:defRPr sz="1800"/>
+            </a:pPr>
+            <a:r>
+              <a:rPr lang="ko-KR" altLang="en-US" sz="1600"/>
+              <a:t>• RK4 수치적분, dt=0.1ms, fn=10Hz, ζ=0.05</a:t>
+            </a:r>
+          </a:p>
+          <a:p>
+            <a:pPr>
+              <a:defRPr sz="1800"/>
+            </a:pPr>
+            <a:r>
+              <a:rPr lang="ko-KR" altLang="en-US" sz="1600"/>
+              <a:t>• 디지털 트윈: Three.js 3D + Chart.js 실시간 시각화</a:t>
+            </a:r>
+          </a:p>
+          <a:p>
+            <a:pPr>
+              <a:defRPr sz="1800"/>
+            </a:pPr>
+            <a:r>
+              <a:rPr lang="ko-KR" altLang="en-US"/>
+              <a:t/>
+            </a:r>
+          </a:p>
+          <a:p>
+            <a:pPr>
+              <a:defRPr sz="1800"/>
+            </a:pPr>
+            <a:r>
+              <a:rPr lang="ko-KR" altLang="en-US"/>
+              <a:t/>
+            </a:r>
+          </a:p>
+          <a:p>
+            <a:pPr>
+              <a:defRPr sz="1800"/>
+            </a:pPr>
+            <a:r>
+              <a:rPr lang="ko-KR" altLang="en-US" b="1" sz="1800"/>
+              <a:t>■ 3. 실험 결과 (정량적 비교)</a:t>
+            </a:r>
+          </a:p>
+          <a:p>
+            <a:pPr>
+              <a:defRPr sz="1800"/>
+            </a:pPr>
+            <a:r>
+              <a:rPr lang="ko-KR" altLang="en-US"/>
+              <a:t/>
+            </a:r>
+          </a:p>
+          <a:p>
+            <a:pPr>
+              <a:defRPr sz="1800"/>
+            </a:pPr>
+            <a:r>
+              <a:rPr lang="ko-KR" altLang="en-US" sz="1600"/>
+              <a:t>                                    Trapezoidal        AS-Curve         AS-Curve+ZVD</a:t>
+            </a:r>
+          </a:p>
+          <a:p>
+            <a:pPr>
+              <a:defRPr sz="1800"/>
+            </a:pPr>
+            <a:r>
+              <a:rPr lang="ko-KR" altLang="en-US" sz="1600"/>
+              <a:t>   잔류 진동                       17.47mm            24.66mm           4.29mm</a:t>
+            </a:r>
+          </a:p>
+          <a:p>
+            <a:pPr>
+              <a:defRPr sz="1800"/>
+            </a:pPr>
+            <a:r>
+              <a:rPr lang="ko-KR" altLang="en-US" sz="1600"/>
+              <a:t>   정착 시간                       2.660s              2.815s             0.197s</a:t>
+            </a:r>
+          </a:p>
+          <a:p>
+            <a:pPr>
+              <a:defRPr sz="1800"/>
+            </a:pPr>
+            <a:r>
+              <a:rPr lang="ko-KR" altLang="en-US" sz="1600"/>
+              <a:t>   UPH                               676                  639               9,137</a:t>
             </a:r>
           </a:p>
         </p:txBody>
@@ -3247,7 +3396,7 @@
                 <a:latin typeface="맑은 고딕" panose="020B0503020000020004" pitchFamily="50" charset="-127"/>
                 <a:ea typeface="맑은 고딕" panose="020B0503020000020004" pitchFamily="50" charset="-127"/>
               </a:rPr>
-              <a:t>작품 구현 및 결과</a:t>
+              <a:t>핵심 성과 및 결론</a:t>
             </a:r>
           </a:p>
         </p:txBody>
@@ -3285,11 +3434,11 @@
                 <a:spcPct val="130000"/>
               </a:lnSpc>
             </a:pPr>
+            <a:endParaRPr lang="en-US" altLang="ko-KR" sz="3200" b="1" dirty="0"/>
             <a:r>
               <a:rPr lang="ko-KR" altLang="en-US" sz="3200" b="1" dirty="0"/>
-              <a:t>프로젝트 제작동기 작성</a:t>
-            </a:r>
-            <a:endParaRPr lang="en-US" altLang="ko-KR" sz="3200" b="1" dirty="0"/>
+              <a:t>프로젝트 제작동기 및 연구 배경</a:t>
+            </a:r>
           </a:p>
         </p:txBody>
       </p:sp>
@@ -3328,19 +3477,7 @@
             </a:pPr>
             <a:r>
               <a:rPr lang="ko-KR" altLang="en-US" sz="3200" b="1" dirty="0"/>
-              <a:t>프로젝트 진행상황에 대하여 작성 </a:t>
-            </a:r>
-            <a:r>
-              <a:rPr lang="en-US" altLang="ko-KR" sz="3200" b="1" dirty="0"/>
-              <a:t>(</a:t>
-            </a:r>
-            <a:r>
-              <a:rPr lang="ko-KR" altLang="en-US" sz="3200" b="1" dirty="0"/>
-              <a:t>사진첨부 가능</a:t>
-            </a:r>
-            <a:r>
-              <a:rPr lang="en-US" altLang="ko-KR" sz="3200" b="1" dirty="0"/>
-              <a:t>)</a:t>
+              <a:t>시스템 모델 및 실험 결과 상세</a:t>
             </a:r>
           </a:p>
         </p:txBody>
@@ -3380,19 +3517,7 @@
             </a:pPr>
             <a:r>
               <a:rPr lang="ko-KR" altLang="en-US" sz="3200" b="1" dirty="0"/>
-              <a:t>작품 구현 및 결과에 대하여 작성 </a:t>
-            </a:r>
-            <a:r>
-              <a:rPr lang="en-US" altLang="ko-KR" sz="3200" b="1" dirty="0"/>
-              <a:t>(</a:t>
-            </a:r>
-            <a:r>
-              <a:rPr lang="ko-KR" altLang="en-US" sz="3200" b="1" dirty="0"/>
-              <a:t>사진첨부 가능</a:t>
-            </a:r>
-            <a:r>
-              <a:rPr lang="en-US" altLang="ko-KR" sz="3200" b="1" dirty="0"/>
-              <a:t>)</a:t>
+              <a:t>핵심 성과 및 향후 과제</a:t>
             </a:r>
           </a:p>
         </p:txBody>
@@ -3430,6 +3555,11 @@
                 <a:spcPct val="130000"/>
               </a:lnSpc>
             </a:pPr>
+            <a:endParaRPr lang="en-US" altLang="ko-KR" sz="3600" b="1" dirty="0">
+              <a:ln w="3175">
+                <a:noFill/>
+              </a:ln>
+            </a:endParaRPr>
             <a:r>
               <a:rPr lang="ko-KR" altLang="en-US" sz="3600" b="1" dirty="0">
                 <a:ln w="3175">
@@ -3438,11 +3568,6 @@
               </a:rPr>
               <a:t>전자공학과</a:t>
             </a:r>
-            <a:endParaRPr lang="en-US" altLang="ko-KR" sz="3600" b="1" dirty="0">
-              <a:ln w="3175">
-                <a:noFill/>
-              </a:ln>
-            </a:endParaRPr>
           </a:p>
         </p:txBody>
       </p:sp>
@@ -3479,27 +3604,19 @@
                 <a:spcPct val="130000"/>
               </a:lnSpc>
             </a:pPr>
+            <a:endParaRPr lang="en-US" altLang="ko-KR" sz="3600" b="1" dirty="0">
+              <a:ln w="3175">
+                <a:noFill/>
+              </a:ln>
+            </a:endParaRPr>
             <a:r>
               <a:rPr lang="ko-KR" altLang="en-US" sz="3600" b="1" dirty="0" err="1">
                 <a:ln w="3175">
                   <a:noFill/>
                 </a:ln>
               </a:rPr>
-              <a:t>송동섭</a:t>
-            </a:r>
-            <a:r>
-              <a:rPr lang="ko-KR" altLang="en-US" sz="3600" b="1" dirty="0">
-                <a:ln w="3175">
-                  <a:noFill/>
-                </a:ln>
-              </a:rPr>
-              <a:t> 교수님</a:t>
-            </a:r>
-            <a:endParaRPr lang="en-US" altLang="ko-KR" sz="3600" b="1" dirty="0">
-              <a:ln w="3175">
-                <a:noFill/>
-              </a:ln>
-            </a:endParaRPr>
+              <a:t>송동섭 교수님</a:t>
+            </a:r>
           </a:p>
         </p:txBody>
       </p:sp>
@@ -3536,6 +3653,11 @@
                 <a:spcPct val="130000"/>
               </a:lnSpc>
             </a:pPr>
+            <a:endParaRPr lang="en-US" altLang="ko-KR" sz="3600" b="1" dirty="0">
+              <a:ln w="3175">
+                <a:noFill/>
+              </a:ln>
+            </a:endParaRPr>
             <a:r>
               <a:rPr lang="ko-KR" altLang="en-US" sz="3600" b="1" dirty="0">
                 <a:ln w="3175">
@@ -3544,11 +3666,6 @@
               </a:rPr>
               <a:t>호서반도체</a:t>
             </a:r>
-            <a:endParaRPr lang="en-US" altLang="ko-KR" sz="3600" b="1" dirty="0">
-              <a:ln w="3175">
-                <a:noFill/>
-              </a:ln>
-            </a:endParaRPr>
           </a:p>
         </p:txBody>
       </p:sp>
@@ -3585,6 +3702,11 @@
                 <a:spcPct val="130000"/>
               </a:lnSpc>
             </a:pPr>
+            <a:endParaRPr lang="en-US" altLang="ko-KR" sz="3600" b="1" dirty="0">
+              <a:ln w="3175">
+                <a:noFill/>
+              </a:ln>
+            </a:endParaRPr>
             <a:r>
               <a:rPr lang="ko-KR" altLang="en-US" sz="3600" b="1" dirty="0">
                 <a:ln w="3175">
@@ -3593,11 +3715,6 @@
               </a:rPr>
               <a:t>삼성전자</a:t>
             </a:r>
-            <a:endParaRPr lang="en-US" altLang="ko-KR" sz="3600" b="1" dirty="0">
-              <a:ln w="3175">
-                <a:noFill/>
-              </a:ln>
-            </a:endParaRPr>
           </a:p>
         </p:txBody>
       </p:sp>
@@ -3751,32 +3868,385 @@
                 <a:spcPct val="130000"/>
               </a:lnSpc>
             </a:pPr>
+            <a:endParaRPr lang="en-US" altLang="ko-KR" sz="4800" b="1" dirty="0">
+              <a:ln w="3175">
+                <a:noFill/>
+              </a:ln>
+            </a:endParaRPr>
             <a:r>
               <a:rPr lang="ko-KR" altLang="en-US" sz="4800" b="1" dirty="0">
                 <a:ln w="3175">
                   <a:noFill/>
                 </a:ln>
               </a:rPr>
-              <a:t>연구주제 작성</a:t>
-            </a:r>
-            <a:endParaRPr lang="en-US" altLang="ko-KR" sz="4800" b="1" dirty="0">
-              <a:ln w="3175">
-                <a:noFill/>
-              </a:ln>
-            </a:endParaRPr>
-          </a:p>
-        </p:txBody>
-      </p:sp>
-      <p:sp>
-        <p:nvSpPr>
-          <p:cNvPr id="23" name="TextBox 22"/>
+              <a:t>AI 기반 비대칭 S-Curve 궤적 최적화 및 인풋쉐이핑을 활용한
+반도체 픽앤플레이스 갠트리 진동 억제 시스템</a:t>
+            </a:r>
+          </a:p>
+        </p:txBody>
+      </p:sp>
+      <p:graphicFrame>
+        <p:nvGraphicFramePr>
+          <p:cNvPr id="23" name="Table 22"/>
+          <p:cNvGraphicFramePr>
+            <a:graphicFrameLocks noGrp="1"/>
+          </p:cNvGraphicFramePr>
+          <p:nvPr/>
+        </p:nvGraphicFramePr>
+        <p:xfrm>
+          <a:off x="1500000" y="23500000"/>
+          <a:ext cx="14000000" cy="3200000"/>
+        </p:xfrm>
+        <a:graphic>
+          <a:graphicData uri="http://schemas.openxmlformats.org/drawingml/2006/table">
+            <a:tbl>
+              <a:tblPr firstRow="1" bandRow="1">
+                <a:tableStyleId>{5C22544A-7EE6-4342-B048-85BDC9FD1C3A}</a:tableStyleId>
+              </a:tblPr>
+              <a:tblGrid>
+                <a:gridCol w="3200000"/>
+                <a:gridCol w="3600000"/>
+                <a:gridCol w="3600000"/>
+                <a:gridCol w="3600000"/>
+              </a:tblGrid>
+              <a:tr h="800000">
+                <a:tc>
+                  <a:txBody>
+                    <a:bodyPr/>
+                    <a:lstStyle/>
+                    <a:p>
+                      <a:pPr algn="ctr"/>
+                      <a:r>
+                        <a:rPr sz="1800" b="1">
+                          <a:solidFill>
+                            <a:srgbClr val="FFFFFF"/>
+                          </a:solidFill>
+                          <a:latin typeface="맑은 고딕"/>
+                        </a:rPr>
+                        <a:t>구분</a:t>
+                      </a:r>
+                    </a:p>
+                  </a:txBody>
+                  <a:tcPr>
+                    <a:solidFill>
+                      <a:srgbClr val="00326E"/>
+                    </a:solidFill>
+                  </a:tcPr>
+                </a:tc>
+                <a:tc>
+                  <a:txBody>
+                    <a:bodyPr/>
+                    <a:lstStyle/>
+                    <a:p>
+                      <a:pPr algn="ctr"/>
+                      <a:r>
+                        <a:rPr sz="1800" b="1">
+                          <a:solidFill>
+                            <a:srgbClr val="FFFFFF"/>
+                          </a:solidFill>
+                          <a:latin typeface="맑은 고딕"/>
+                        </a:rPr>
+                        <a:t>Trapezoidal</a:t>
+                      </a:r>
+                    </a:p>
+                  </a:txBody>
+                  <a:tcPr>
+                    <a:solidFill>
+                      <a:srgbClr val="00326E"/>
+                    </a:solidFill>
+                  </a:tcPr>
+                </a:tc>
+                <a:tc>
+                  <a:txBody>
+                    <a:bodyPr/>
+                    <a:lstStyle/>
+                    <a:p>
+                      <a:pPr algn="ctr"/>
+                      <a:r>
+                        <a:rPr sz="1800" b="1">
+                          <a:solidFill>
+                            <a:srgbClr val="FFFFFF"/>
+                          </a:solidFill>
+                          <a:latin typeface="맑은 고딕"/>
+                        </a:rPr>
+                        <a:t>AS-Curve</a:t>
+                      </a:r>
+                    </a:p>
+                  </a:txBody>
+                  <a:tcPr>
+                    <a:solidFill>
+                      <a:srgbClr val="00326E"/>
+                    </a:solidFill>
+                  </a:tcPr>
+                </a:tc>
+                <a:tc>
+                  <a:txBody>
+                    <a:bodyPr/>
+                    <a:lstStyle/>
+                    <a:p>
+                      <a:pPr algn="ctr"/>
+                      <a:r>
+                        <a:rPr sz="1800" b="1">
+                          <a:solidFill>
+                            <a:srgbClr val="FFFFFF"/>
+                          </a:solidFill>
+                          <a:latin typeface="맑은 고딕"/>
+                        </a:rPr>
+                        <a:t>AS-Curve+ZVD</a:t>
+                      </a:r>
+                    </a:p>
+                  </a:txBody>
+                  <a:tcPr>
+                    <a:solidFill>
+                      <a:srgbClr val="00326E"/>
+                    </a:solidFill>
+                  </a:tcPr>
+                </a:tc>
+              </a:tr>
+              <a:tr h="800000">
+                <a:tc>
+                  <a:txBody>
+                    <a:bodyPr/>
+                    <a:lstStyle/>
+                    <a:p>
+                      <a:pPr algn="ctr"/>
+                      <a:r>
+                        <a:rPr sz="1800" b="1">
+                          <a:latin typeface="맑은 고딕"/>
+                        </a:rPr>
+                        <a:t>잔류 진동</a:t>
+                      </a:r>
+                    </a:p>
+                  </a:txBody>
+                  <a:tcPr>
+                    <a:solidFill>
+                      <a:srgbClr val="E8EEF7"/>
+                    </a:solidFill>
+                  </a:tcPr>
+                </a:tc>
+                <a:tc>
+                  <a:txBody>
+                    <a:bodyPr/>
+                    <a:lstStyle/>
+                    <a:p>
+                      <a:pPr algn="ctr"/>
+                      <a:r>
+                        <a:rPr sz="1800">
+                          <a:latin typeface="맑은 고딕"/>
+                        </a:rPr>
+                        <a:t>17.47mm</a:t>
+                      </a:r>
+                    </a:p>
+                  </a:txBody>
+                  <a:tcPr>
+                    <a:solidFill>
+                      <a:srgbClr val="E8EEF7"/>
+                    </a:solidFill>
+                  </a:tcPr>
+                </a:tc>
+                <a:tc>
+                  <a:txBody>
+                    <a:bodyPr/>
+                    <a:lstStyle/>
+                    <a:p>
+                      <a:pPr algn="ctr"/>
+                      <a:r>
+                        <a:rPr sz="1800">
+                          <a:latin typeface="맑은 고딕"/>
+                        </a:rPr>
+                        <a:t>24.66mm</a:t>
+                      </a:r>
+                    </a:p>
+                  </a:txBody>
+                  <a:tcPr>
+                    <a:solidFill>
+                      <a:srgbClr val="E8EEF7"/>
+                    </a:solidFill>
+                  </a:tcPr>
+                </a:tc>
+                <a:tc>
+                  <a:txBody>
+                    <a:bodyPr/>
+                    <a:lstStyle/>
+                    <a:p>
+                      <a:pPr algn="ctr"/>
+                      <a:r>
+                        <a:rPr sz="1800">
+                          <a:latin typeface="맑은 고딕"/>
+                        </a:rPr>
+                        <a:t>4.29mm</a:t>
+                      </a:r>
+                    </a:p>
+                  </a:txBody>
+                  <a:tcPr>
+                    <a:solidFill>
+                      <a:srgbClr val="E8EEF7"/>
+                    </a:solidFill>
+                  </a:tcPr>
+                </a:tc>
+              </a:tr>
+              <a:tr h="800000">
+                <a:tc>
+                  <a:txBody>
+                    <a:bodyPr/>
+                    <a:lstStyle/>
+                    <a:p>
+                      <a:pPr algn="ctr"/>
+                      <a:r>
+                        <a:rPr sz="1800" b="1">
+                          <a:latin typeface="맑은 고딕"/>
+                        </a:rPr>
+                        <a:t>정착 시간</a:t>
+                      </a:r>
+                    </a:p>
+                  </a:txBody>
+                  <a:tcPr/>
+                </a:tc>
+                <a:tc>
+                  <a:txBody>
+                    <a:bodyPr/>
+                    <a:lstStyle/>
+                    <a:p>
+                      <a:pPr algn="ctr"/>
+                      <a:r>
+                        <a:rPr sz="1800">
+                          <a:latin typeface="맑은 고딕"/>
+                        </a:rPr>
+                        <a:t>2.660s</a:t>
+                      </a:r>
+                    </a:p>
+                  </a:txBody>
+                  <a:tcPr/>
+                </a:tc>
+                <a:tc>
+                  <a:txBody>
+                    <a:bodyPr/>
+                    <a:lstStyle/>
+                    <a:p>
+                      <a:pPr algn="ctr"/>
+                      <a:r>
+                        <a:rPr sz="1800">
+                          <a:latin typeface="맑은 고딕"/>
+                        </a:rPr>
+                        <a:t>2.815s</a:t>
+                      </a:r>
+                    </a:p>
+                  </a:txBody>
+                  <a:tcPr/>
+                </a:tc>
+                <a:tc>
+                  <a:txBody>
+                    <a:bodyPr/>
+                    <a:lstStyle/>
+                    <a:p>
+                      <a:pPr algn="ctr"/>
+                      <a:r>
+                        <a:rPr sz="1800">
+                          <a:latin typeface="맑은 고딕"/>
+                        </a:rPr>
+                        <a:t>0.197s</a:t>
+                      </a:r>
+                    </a:p>
+                  </a:txBody>
+                  <a:tcPr/>
+                </a:tc>
+              </a:tr>
+              <a:tr h="800000">
+                <a:tc>
+                  <a:txBody>
+                    <a:bodyPr/>
+                    <a:lstStyle/>
+                    <a:p>
+                      <a:pPr algn="ctr"/>
+                      <a:r>
+                        <a:rPr sz="1800" b="1">
+                          <a:latin typeface="맑은 고딕"/>
+                        </a:rPr>
+                        <a:t>UPH</a:t>
+                      </a:r>
+                    </a:p>
+                  </a:txBody>
+                  <a:tcPr>
+                    <a:solidFill>
+                      <a:srgbClr val="E8EEF7"/>
+                    </a:solidFill>
+                  </a:tcPr>
+                </a:tc>
+                <a:tc>
+                  <a:txBody>
+                    <a:bodyPr/>
+                    <a:lstStyle/>
+                    <a:p>
+                      <a:pPr algn="ctr"/>
+                      <a:r>
+                        <a:rPr sz="1800">
+                          <a:latin typeface="맑은 고딕"/>
+                        </a:rPr>
+                        <a:t>676</a:t>
+                      </a:r>
+                    </a:p>
+                  </a:txBody>
+                  <a:tcPr>
+                    <a:solidFill>
+                      <a:srgbClr val="E8EEF7"/>
+                    </a:solidFill>
+                  </a:tcPr>
+                </a:tc>
+                <a:tc>
+                  <a:txBody>
+                    <a:bodyPr/>
+                    <a:lstStyle/>
+                    <a:p>
+                      <a:pPr algn="ctr"/>
+                      <a:r>
+                        <a:rPr sz="1800">
+                          <a:latin typeface="맑은 고딕"/>
+                        </a:rPr>
+                        <a:t>639</a:t>
+                      </a:r>
+                    </a:p>
+                  </a:txBody>
+                  <a:tcPr>
+                    <a:solidFill>
+                      <a:srgbClr val="E8EEF7"/>
+                    </a:solidFill>
+                  </a:tcPr>
+                </a:tc>
+                <a:tc>
+                  <a:txBody>
+                    <a:bodyPr/>
+                    <a:lstStyle/>
+                    <a:p>
+                      <a:pPr algn="ctr"/>
+                      <a:r>
+                        <a:rPr sz="1800">
+                          <a:latin typeface="맑은 고딕"/>
+                        </a:rPr>
+                        <a:t>9,137</a:t>
+                      </a:r>
+                    </a:p>
+                  </a:txBody>
+                  <a:tcPr>
+                    <a:solidFill>
+                      <a:srgbClr val="E8EEF7"/>
+                    </a:solidFill>
+                  </a:tcPr>
+                </a:tc>
+              </a:tr>
+            </a:tbl>
+          </a:graphicData>
+        </a:graphic>
+      </p:graphicFrame>
+      <p:sp>
+        <p:nvSpPr>
+          <p:cNvPr id="24" name="TextBox 23"/>
           <p:cNvSpPr txBox="1"/>
           <p:nvPr/>
         </p:nvSpPr>
         <p:spPr>
           <a:xfrm>
-            <a:off x="0" y="0"/>
-            <a:ext cx="18359438" cy="51120675"/>
+            <a:off x="500000" y="33200000"/>
+            <a:ext cx="17200000" cy="8000000"/>
           </a:xfrm>
           <a:prstGeom prst="rect">
             <a:avLst/>
@@ -3789,61 +4259,113 @@
           </a:bodyPr>
           <a:lstStyle/>
           <a:p>
-            <a:pPr>
-              <a:defRPr sz="2400" b="1"/>
-            </a:pPr>
-            <a:r>
-              <a:t>[AI 자동 완성 초안 - 디자인에 맞게 옮겨 적어주세요!]</a:t>
-            </a:r>
-          </a:p>
-          <a:p/>
-          <a:p/>
-          <a:p>
-            <a:pPr>
-              <a:defRPr sz="2400" b="1"/>
-            </a:pPr>
-            <a:r>
-              <a:t>[연구 배경 및 목적]</a:t>
-            </a:r>
-            <a:br/>
-            <a:r>
-              <a:t>반도체 패키징 공정 생산성(UPH) 향상을 위해 고속 이송 시 로봇 끝단에 잔류 진동 발생. 정착 시간을 최소화하면서 가장 빠른 이송이 가능한 궤적 최적화 목표.</a:t>
-            </a:r>
-            <a:br/>
-            <a:br/>
-          </a:p>
-          <a:p>
-            <a:pPr>
-              <a:defRPr sz="2400" b="1"/>
-            </a:pPr>
-            <a:r>
-              <a:t>[핵심 기술]</a:t>
-            </a:r>
-            <a:br/>
-            <a:r>
-              <a:t>1. 비대칭 S-Curve (AS-Curve): 가속은 빠르게, 감속은 부드럽게 설계하여 물리적 충격 최소화</a:t>
-            </a:r>
-            <a:br/>
-            <a:r>
-              <a:t>2. Input Shaping: 시스템의 고유진동수(fn)를 분석해 역위상 임펄스를 인가하여 진동 상쇄</a:t>
-            </a:r>
-            <a:br/>
-            <a:r>
-              <a:t>3. AI 최적화 (PSO): 최소 정착 시간을 갖는 파라미터(V_max, A_max, Beta 등) 자동 도출</a:t>
-            </a:r>
-            <a:br/>
-            <a:br/>
-          </a:p>
-          <a:p>
-            <a:pPr>
-              <a:defRPr sz="2400" b="1"/>
-            </a:pPr>
-            <a:r>
-              <a:t>[디지털 트윈 및 결과]</a:t>
-            </a:r>
-            <a:br/>
-            <a:r>
-              <a:t>실제 동역학 모델을 웹 환경의 3D 시뮬레이션으로 구현. 제어 미적용(Baseline) 대비 제어 적용(Shaped) 시 잔류 진동 오차가 0으로 수렴함을 입증함.</a:t>
+            <a:r>
+              <a:rPr sz="1800" b="1">
+                <a:solidFill>
+                  <a:srgbClr val="00326E"/>
+                </a:solidFill>
+                <a:latin typeface="맑은 고딕"/>
+              </a:rPr>
+              <a:t>■ 4. 핵심 성과</a:t>
+            </a:r>
+          </a:p>
+          <a:p>
+            <a:r>
+              <a:rPr sz="1400" b="0">
+                <a:latin typeface="맑은 고딕"/>
+              </a:rPr>
+              <a:t/>
+            </a:r>
+          </a:p>
+          <a:p>
+            <a:r>
+              <a:rPr sz="1600" b="0">
+                <a:latin typeface="맑은 고딕"/>
+              </a:rPr>
+              <a:t>• 잔류 진동 75.4% 감소 (17.47mm → 4.29mm)</a:t>
+            </a:r>
+          </a:p>
+          <a:p>
+            <a:r>
+              <a:rPr sz="1600" b="0">
+                <a:latin typeface="맑은 고딕"/>
+              </a:rPr>
+              <a:t>• 정착 시간 92.6% 단축 (2.660s → 0.197s)</a:t>
+            </a:r>
+          </a:p>
+          <a:p>
+            <a:r>
+              <a:rPr sz="1600" b="0">
+                <a:latin typeface="맑은 고딕"/>
+              </a:rPr>
+              <a:t>• UPH 1,252% 향상 (676 → 9,137)</a:t>
+            </a:r>
+          </a:p>
+          <a:p>
+            <a:r>
+              <a:rPr sz="1400" b="0">
+                <a:latin typeface="맑은 고딕"/>
+              </a:rPr>
+              <a:t/>
+            </a:r>
+          </a:p>
+          <a:p>
+            <a:r>
+              <a:rPr sz="1400" b="0">
+                <a:latin typeface="맑은 고딕"/>
+              </a:rPr>
+              <a:t/>
+            </a:r>
+          </a:p>
+          <a:p>
+            <a:r>
+              <a:rPr sz="1800" b="1">
+                <a:solidFill>
+                  <a:srgbClr val="00326E"/>
+                </a:solidFill>
+                <a:latin typeface="맑은 고딕"/>
+              </a:rPr>
+              <a:t>■ 5. 결론 및 향후 과제</a:t>
+            </a:r>
+          </a:p>
+          <a:p>
+            <a:r>
+              <a:rPr sz="1400" b="0">
+                <a:latin typeface="맑은 고딕"/>
+              </a:rPr>
+              <a:t/>
+            </a:r>
+          </a:p>
+          <a:p>
+            <a:r>
+              <a:rPr sz="1600" b="0">
+                <a:latin typeface="맑은 고딕"/>
+              </a:rPr>
+              <a:t>• ZVD 인풋쉐이핑은 약 100ms의 지연으로 2.5초의 진동 대기를 제거</a:t>
+            </a:r>
+          </a:p>
+          <a:p>
+            <a:r>
+              <a:rPr sz="1600" b="0">
+                <a:latin typeface="맑은 고딕"/>
+              </a:rPr>
+              <a:t>• 비대칭 S-Curve + ZVD 조합으로 최적의 진동 억제 성능 달성</a:t>
+            </a:r>
+          </a:p>
+          <a:p>
+            <a:r>
+              <a:rPr sz="1600" b="0">
+                <a:latin typeface="맑은 고딕"/>
+              </a:rPr>
+              <a:t>• 향후 실물 하드웨어(STM32 + IMU) 검증 필요</a:t>
+            </a:r>
+          </a:p>
+          <a:p>
+            <a:r>
+              <a:rPr sz="1600" b="0">
+                <a:latin typeface="맑은 고딕"/>
+              </a:rPr>
+              <a:t>• PSO 알고리즘을 통한 파라미터 자동 최적화 고도화 계획</a:t>
             </a:r>
           </a:p>
         </p:txBody>

--- a/[완성본] 2026년 산학프로젝트 포스터.pptx
+++ b/[완성본] 2026년 산학프로젝트 포스터.pptx
@@ -3098,7 +3098,7 @@
           <a:lstStyle/>
           <a:p>
             <a:r>
-              <a:t>AI 기반 비대칭 S-Curve 궤적 최적화 및 인풋쉐이핑을 활용한 반도체 픽앤플레이스 갠트리 진동 억제 시스템</a:t>
+              <a:t>인풋쉐이핑 및 비대칭 S-curve 기반 픽앤플레이스 진동 제어 AI 시뮬레이터</a:t>
             </a:r>
           </a:p>
         </p:txBody>
@@ -3156,8 +3156,7 @@
               <a:defRPr sz="1800"/>
             </a:pPr>
             <a:r>
-              <a:rPr lang="ko-KR" altLang="en-US" b="1" sz="1800"/>
-              <a:t>■ 1. 연구 배경</a:t>
+              <a:t>[1. 연구 배경 및 목적]</a:t>
             </a:r>
           </a:p>
           <a:p>
@@ -3165,8 +3164,7 @@
               <a:defRPr sz="1800"/>
             </a:pPr>
             <a:r>
-              <a:rPr lang="ko-KR" altLang="en-US"/>
-              <a:t/>
+              <a:t>- 반도체 픽앤플레이스 장비의 생산성(UPH) 향상을 위해 고속 이송 시 발생하는 잔류진동 억제 필수.</a:t>
             </a:r>
           </a:p>
           <a:p>
@@ -3174,26 +3172,20 @@
               <a:defRPr sz="1800"/>
             </a:pPr>
             <a:r>
-              <a:rPr lang="ko-KR" altLang="en-US" sz="1600"/>
-              <a:t>• 반도체 Pick &amp; Place 공정에서 갠트리 고속 이동 시 잔류 진동 발생</a:t>
+              <a:t>- 하드웨어 제작 전, 물리 동역학 방정식 기반의 '디지털 트윈 시뮬레이터'를 개발하여 최적의 모션 제어 알고리즘을 설계하고 검증함.</a:t>
             </a:r>
           </a:p>
           <a:p>
             <a:pPr>
               <a:defRPr sz="1800"/>
             </a:pPr>
-            <a:r>
-              <a:rPr lang="ko-KR" altLang="en-US" sz="1600"/>
-              <a:t>• 진동이 정착될 때까지 대기 → UPH(생산성) 저하의 직접적 원인</a:t>
-            </a:r>
           </a:p>
           <a:p>
             <a:pPr>
               <a:defRPr sz="1800"/>
             </a:pPr>
             <a:r>
-              <a:rPr lang="ko-KR" altLang="en-US" sz="1600"/>
-              <a:t>• 해결: 모션 프로파일 최적화 + 인풋쉐이핑(ZVD)으로 진동 원천 억제</a:t>
+              <a:t>[2. 핵심 제어 알고리즘]</a:t>
             </a:r>
           </a:p>
           <a:p>
@@ -3201,8 +3193,7 @@
               <a:defRPr sz="1800"/>
             </a:pPr>
             <a:r>
-              <a:rPr lang="ko-KR" altLang="en-US"/>
-              <a:t/>
+              <a:t>- ① Trapezoidal (기준 프로파일)</a:t>
             </a:r>
           </a:p>
           <a:p>
@@ -3210,8 +3201,7 @@
               <a:defRPr sz="1800"/>
             </a:pPr>
             <a:r>
-              <a:rPr lang="ko-KR" altLang="en-US"/>
-              <a:t/>
+              <a:t>- ② 비대칭 S-Curve: 가속/감속 구간의 물리적 충격(Jerk) 최소화</a:t>
             </a:r>
           </a:p>
           <a:p>
@@ -3219,26 +3209,20 @@
               <a:defRPr sz="1800"/>
             </a:pPr>
             <a:r>
-              <a:rPr lang="ko-KR" altLang="en-US" b="1" sz="1800"/>
-              <a:t>■ 2. 시스템 모델</a:t>
+              <a:t>- ③ Input Shaping: 파동 상쇄 간섭 원리를 이용해 잔류진동 원천 억제 (ZV/ZVD 쉐이퍼)</a:t>
             </a:r>
           </a:p>
           <a:p>
             <a:pPr>
               <a:defRPr sz="1800"/>
             </a:pPr>
-            <a:r>
-              <a:rPr lang="ko-KR" altLang="en-US"/>
-              <a:t/>
-            </a:r>
           </a:p>
           <a:p>
             <a:pPr>
               <a:defRPr sz="1800"/>
             </a:pPr>
             <a:r>
-              <a:rPr lang="ko-KR" altLang="en-US" sz="1600"/>
-              <a:t>• 2-Mass Model: Motor(Perfect Servo) → Spring-Damper → Load</a:t>
+              <a:t>[3. 시뮬레이션 및 AI 최적화 (PSO)]</a:t>
             </a:r>
           </a:p>
           <a:p>
@@ -3246,8 +3230,7 @@
               <a:defRPr sz="1800"/>
             </a:pPr>
             <a:r>
-              <a:rPr lang="ko-KR" altLang="en-US" sz="1600"/>
-              <a:t>• RK4 수치적분, dt=0.1ms, fn=10Hz, ζ=0.05</a:t>
+              <a:t>- Three.js 기반 3D 웹 디지털 트윈을 구축하여 궤적별 실시간 진동 오차 시각화.</a:t>
             </a:r>
           </a:p>
           <a:p>
@@ -3255,26 +3238,20 @@
               <a:defRPr sz="1800"/>
             </a:pPr>
             <a:r>
-              <a:rPr lang="ko-KR" altLang="en-US" sz="1600"/>
-              <a:t>• 디지털 트윈: Three.js 3D + Chart.js 실시간 시각화</a:t>
+              <a:t>- 입자군집최적화(PSO) 알고리즘을 백그라운드에 적용하여, 진동이 0이 되면서 가장 빠른 정착시간을 내는 파라미터(V_max, A_max, Beta 등) 자동 탐색.</a:t>
             </a:r>
           </a:p>
           <a:p>
             <a:pPr>
               <a:defRPr sz="1800"/>
             </a:pPr>
-            <a:r>
-              <a:rPr lang="ko-KR" altLang="en-US"/>
-              <a:t/>
-            </a:r>
           </a:p>
           <a:p>
             <a:pPr>
               <a:defRPr sz="1800"/>
             </a:pPr>
             <a:r>
-              <a:rPr lang="ko-KR" altLang="en-US"/>
-              <a:t/>
+              <a:t>[4. 연구 결과 및 기대 효과]</a:t>
             </a:r>
           </a:p>
           <a:p>
@@ -3282,8 +3259,7 @@
               <a:defRPr sz="1800"/>
             </a:pPr>
             <a:r>
-              <a:rPr lang="ko-KR" altLang="en-US" b="1" sz="1800"/>
-              <a:t>■ 3. 실험 결과 (정량적 비교)</a:t>
+              <a:t>- 시뮬레이션 결과, 제어 미적용(Trapezoidal) 대비 제어 적용(Shaped) 시 잔류진동 수렴 시간이 획기적으로 단축됨.</a:t>
             </a:r>
           </a:p>
           <a:p>
@@ -3291,44 +3267,7 @@
               <a:defRPr sz="1800"/>
             </a:pPr>
             <a:r>
-              <a:rPr lang="ko-KR" altLang="en-US"/>
-              <a:t/>
-            </a:r>
-          </a:p>
-          <a:p>
-            <a:pPr>
-              <a:defRPr sz="1800"/>
-            </a:pPr>
-            <a:r>
-              <a:rPr lang="ko-KR" altLang="en-US" sz="1600"/>
-              <a:t>                                    Trapezoidal        AS-Curve         AS-Curve+ZVD</a:t>
-            </a:r>
-          </a:p>
-          <a:p>
-            <a:pPr>
-              <a:defRPr sz="1800"/>
-            </a:pPr>
-            <a:r>
-              <a:rPr lang="ko-KR" altLang="en-US" sz="1600"/>
-              <a:t>   잔류 진동                       17.47mm            24.66mm           4.29mm</a:t>
-            </a:r>
-          </a:p>
-          <a:p>
-            <a:pPr>
-              <a:defRPr sz="1800"/>
-            </a:pPr>
-            <a:r>
-              <a:rPr lang="ko-KR" altLang="en-US" sz="1600"/>
-              <a:t>   정착 시간                       2.660s              2.815s             0.197s</a:t>
-            </a:r>
-          </a:p>
-          <a:p>
-            <a:pPr>
-              <a:defRPr sz="1800"/>
-            </a:pPr>
-            <a:r>
-              <a:rPr lang="ko-KR" altLang="en-US" sz="1600"/>
-              <a:t>   UPH                               676                  639               9,137</a:t>
+              <a:t>- 오프라인 시뮬레이션을 통한 사전 AI 튜닝으로 반도체 장비 셋업 시간 단축 및 UPH 극대화 기여.</a:t>
             </a:r>
           </a:p>
         </p:txBody>
@@ -3396,7 +3335,7 @@
                 <a:latin typeface="맑은 고딕" panose="020B0503020000020004" pitchFamily="50" charset="-127"/>
                 <a:ea typeface="맑은 고딕" panose="020B0503020000020004" pitchFamily="50" charset="-127"/>
               </a:rPr>
-              <a:t>핵심 성과 및 결론</a:t>
+              <a:t>작품 구현 및 결과</a:t>
             </a:r>
           </a:p>
         </p:txBody>
@@ -3434,11 +3373,11 @@
                 <a:spcPct val="130000"/>
               </a:lnSpc>
             </a:pPr>
+            <a:r>
+              <a:rPr lang="ko-KR" altLang="en-US" sz="3200" b="1" dirty="0"/>
+              <a:t>프로젝트 제작동기 작성</a:t>
+            </a:r>
             <a:endParaRPr lang="en-US" altLang="ko-KR" sz="3200" b="1" dirty="0"/>
-            <a:r>
-              <a:rPr lang="ko-KR" altLang="en-US" sz="3200" b="1" dirty="0"/>
-              <a:t>프로젝트 제작동기 및 연구 배경</a:t>
-            </a:r>
           </a:p>
         </p:txBody>
       </p:sp>
@@ -3477,7 +3416,19 @@
             </a:pPr>
             <a:r>
               <a:rPr lang="ko-KR" altLang="en-US" sz="3200" b="1" dirty="0"/>
-              <a:t>시스템 모델 및 실험 결과 상세</a:t>
+              <a:t>프로젝트 진행상황에 대하여 작성 </a:t>
+            </a:r>
+            <a:r>
+              <a:rPr lang="en-US" altLang="ko-KR" sz="3200" b="1" dirty="0"/>
+              <a:t>(</a:t>
+            </a:r>
+            <a:r>
+              <a:rPr lang="ko-KR" altLang="en-US" sz="3200" b="1" dirty="0"/>
+              <a:t>사진첨부 가능</a:t>
+            </a:r>
+            <a:r>
+              <a:rPr lang="en-US" altLang="ko-KR" sz="3200" b="1" dirty="0"/>
+              <a:t>)</a:t>
             </a:r>
           </a:p>
         </p:txBody>
@@ -3517,7 +3468,19 @@
             </a:pPr>
             <a:r>
               <a:rPr lang="ko-KR" altLang="en-US" sz="3200" b="1" dirty="0"/>
-              <a:t>핵심 성과 및 향후 과제</a:t>
+              <a:t>작품 구현 및 결과에 대하여 작성 </a:t>
+            </a:r>
+            <a:r>
+              <a:rPr lang="en-US" altLang="ko-KR" sz="3200" b="1" dirty="0"/>
+              <a:t>(</a:t>
+            </a:r>
+            <a:r>
+              <a:rPr lang="ko-KR" altLang="en-US" sz="3200" b="1" dirty="0"/>
+              <a:t>사진첨부 가능</a:t>
+            </a:r>
+            <a:r>
+              <a:rPr lang="en-US" altLang="ko-KR" sz="3200" b="1" dirty="0"/>
+              <a:t>)</a:t>
             </a:r>
           </a:p>
         </p:txBody>
@@ -3555,11 +3518,6 @@
                 <a:spcPct val="130000"/>
               </a:lnSpc>
             </a:pPr>
-            <a:endParaRPr lang="en-US" altLang="ko-KR" sz="3600" b="1" dirty="0">
-              <a:ln w="3175">
-                <a:noFill/>
-              </a:ln>
-            </a:endParaRPr>
             <a:r>
               <a:rPr lang="ko-KR" altLang="en-US" sz="3600" b="1" dirty="0">
                 <a:ln w="3175">
@@ -3568,6 +3526,11 @@
               </a:rPr>
               <a:t>전자공학과</a:t>
             </a:r>
+            <a:endParaRPr lang="en-US" altLang="ko-KR" sz="3600" b="1" dirty="0">
+              <a:ln w="3175">
+                <a:noFill/>
+              </a:ln>
+            </a:endParaRPr>
           </a:p>
         </p:txBody>
       </p:sp>
@@ -3604,19 +3567,27 @@
                 <a:spcPct val="130000"/>
               </a:lnSpc>
             </a:pPr>
+            <a:r>
+              <a:rPr lang="ko-KR" altLang="en-US" sz="3600" b="1" dirty="0" err="1">
+                <a:ln w="3175">
+                  <a:noFill/>
+                </a:ln>
+              </a:rPr>
+              <a:t>송동섭</a:t>
+            </a:r>
+            <a:r>
+              <a:rPr lang="ko-KR" altLang="en-US" sz="3600" b="1" dirty="0">
+                <a:ln w="3175">
+                  <a:noFill/>
+                </a:ln>
+              </a:rPr>
+              <a:t> 교수님</a:t>
+            </a:r>
             <a:endParaRPr lang="en-US" altLang="ko-KR" sz="3600" b="1" dirty="0">
               <a:ln w="3175">
                 <a:noFill/>
               </a:ln>
             </a:endParaRPr>
-            <a:r>
-              <a:rPr lang="ko-KR" altLang="en-US" sz="3600" b="1" dirty="0" err="1">
-                <a:ln w="3175">
-                  <a:noFill/>
-                </a:ln>
-              </a:rPr>
-              <a:t>송동섭 교수님</a:t>
-            </a:r>
           </a:p>
         </p:txBody>
       </p:sp>
@@ -3653,11 +3624,6 @@
                 <a:spcPct val="130000"/>
               </a:lnSpc>
             </a:pPr>
-            <a:endParaRPr lang="en-US" altLang="ko-KR" sz="3600" b="1" dirty="0">
-              <a:ln w="3175">
-                <a:noFill/>
-              </a:ln>
-            </a:endParaRPr>
             <a:r>
               <a:rPr lang="ko-KR" altLang="en-US" sz="3600" b="1" dirty="0">
                 <a:ln w="3175">
@@ -3666,6 +3632,11 @@
               </a:rPr>
               <a:t>호서반도체</a:t>
             </a:r>
+            <a:endParaRPr lang="en-US" altLang="ko-KR" sz="3600" b="1" dirty="0">
+              <a:ln w="3175">
+                <a:noFill/>
+              </a:ln>
+            </a:endParaRPr>
           </a:p>
         </p:txBody>
       </p:sp>
@@ -3702,11 +3673,6 @@
                 <a:spcPct val="130000"/>
               </a:lnSpc>
             </a:pPr>
-            <a:endParaRPr lang="en-US" altLang="ko-KR" sz="3600" b="1" dirty="0">
-              <a:ln w="3175">
-                <a:noFill/>
-              </a:ln>
-            </a:endParaRPr>
             <a:r>
               <a:rPr lang="ko-KR" altLang="en-US" sz="3600" b="1" dirty="0">
                 <a:ln w="3175">
@@ -3715,6 +3681,11 @@
               </a:rPr>
               <a:t>삼성전자</a:t>
             </a:r>
+            <a:endParaRPr lang="en-US" altLang="ko-KR" sz="3600" b="1" dirty="0">
+              <a:ln w="3175">
+                <a:noFill/>
+              </a:ln>
+            </a:endParaRPr>
           </a:p>
         </p:txBody>
       </p:sp>
@@ -3868,34 +3839,333 @@
                 <a:spcPct val="130000"/>
               </a:lnSpc>
             </a:pPr>
+            <a:r>
+              <a:rPr lang="ko-KR" altLang="en-US" sz="4800" b="1" dirty="0">
+                <a:ln w="3175">
+                  <a:noFill/>
+                </a:ln>
+              </a:rPr>
+              <a:t>연구주제 작성</a:t>
+            </a:r>
             <a:endParaRPr lang="en-US" altLang="ko-KR" sz="4800" b="1" dirty="0">
               <a:ln w="3175">
                 <a:noFill/>
               </a:ln>
             </a:endParaRPr>
-            <a:r>
-              <a:rPr lang="ko-KR" altLang="en-US" sz="4800" b="1" dirty="0">
-                <a:ln w="3175">
-                  <a:noFill/>
-                </a:ln>
-              </a:rPr>
-              <a:t>AI 기반 비대칭 S-Curve 궤적 최적화 및 인풋쉐이핑을 활용한
-반도체 픽앤플레이스 갠트리 진동 억제 시스템</a:t>
+          </a:p>
+        </p:txBody>
+      </p:sp>
+      <p:sp>
+        <p:nvSpPr>
+          <p:cNvPr id="23" name="TextBox 22"/>
+          <p:cNvSpPr txBox="1"/>
+          <p:nvPr/>
+        </p:nvSpPr>
+        <p:spPr>
+          <a:xfrm>
+            <a:off x="734377" y="1022413"/>
+            <a:ext cx="16890682" cy="3067240"/>
+          </a:xfrm>
+          <a:prstGeom prst="rect">
+            <a:avLst/>
+          </a:prstGeom>
+          <a:noFill/>
+        </p:spPr>
+        <p:txBody>
+          <a:bodyPr wrap="square">
+            <a:spAutoFit/>
+          </a:bodyPr>
+          <a:lstStyle/>
+          <a:p>
+            <a:pPr algn="ctr">
+              <a:defRPr sz="1600" b="1">
+                <a:solidFill>
+                  <a:srgbClr val="1E3A5F"/>
+                </a:solidFill>
+              </a:defRPr>
+            </a:pPr>
+            <a:r>
+              <a:t>AI 기반 비대칭 S-Curve 궤적 최적화 및 인풋쉐이핑을 활용한 반도체 픽앤플레이스 갠트리 진동 억제 시스템</a:t>
+            </a:r>
+          </a:p>
+        </p:txBody>
+      </p:sp>
+      <p:sp>
+        <p:nvSpPr>
+          <p:cNvPr id="24" name="TextBox 23"/>
+          <p:cNvSpPr txBox="1"/>
+          <p:nvPr/>
+        </p:nvSpPr>
+        <p:spPr>
+          <a:xfrm>
+            <a:off x="734377" y="5112067"/>
+            <a:ext cx="8078152" cy="12780168"/>
+          </a:xfrm>
+          <a:prstGeom prst="rect">
+            <a:avLst/>
+          </a:prstGeom>
+          <a:noFill/>
+        </p:spPr>
+        <p:txBody>
+          <a:bodyPr wrap="square">
+            <a:spAutoFit/>
+          </a:bodyPr>
+          <a:lstStyle/>
+          <a:p>
+            <a:pPr>
+              <a:spcAft>
+                <a:spcPts val="200"/>
+              </a:spcAft>
+              <a:defRPr sz="1200" b="1">
+                <a:solidFill>
+                  <a:srgbClr val="1F2937"/>
+                </a:solidFill>
+              </a:defRPr>
+            </a:pPr>
+            <a:r>
+              <a:t>1. 연구 배경 및 목적</a:t>
+            </a:r>
+          </a:p>
+          <a:p>
+            <a:pPr>
+              <a:spcAft>
+                <a:spcPts val="200"/>
+              </a:spcAft>
+              <a:defRPr sz="400" b="0">
+                <a:solidFill>
+                  <a:srgbClr val="1F2937"/>
+                </a:solidFill>
+              </a:defRPr>
+            </a:pPr>
+          </a:p>
+          <a:p>
+            <a:pPr>
+              <a:spcAft>
+                <a:spcPts val="200"/>
+              </a:spcAft>
+              <a:defRPr sz="900" b="0">
+                <a:solidFill>
+                  <a:srgbClr val="1F2937"/>
+                </a:solidFill>
+              </a:defRPr>
+            </a:pPr>
+            <a:r>
+              <a:t>• 반도체 Pick &amp; Place 공정에서 갠트리 고속 이동 시 잔류 진동 발생</a:t>
+            </a:r>
+          </a:p>
+          <a:p>
+            <a:pPr>
+              <a:spcAft>
+                <a:spcPts val="200"/>
+              </a:spcAft>
+              <a:defRPr sz="900" b="0">
+                <a:solidFill>
+                  <a:srgbClr val="1F2937"/>
+                </a:solidFill>
+              </a:defRPr>
+            </a:pPr>
+            <a:r>
+              <a:t>• 진동이 정착될 때까지 대기 → UPH(생산성) 저하의 직접적 원인</a:t>
+            </a:r>
+          </a:p>
+          <a:p>
+            <a:pPr>
+              <a:spcAft>
+                <a:spcPts val="200"/>
+              </a:spcAft>
+              <a:defRPr sz="900" b="0">
+                <a:solidFill>
+                  <a:srgbClr val="1F2937"/>
+                </a:solidFill>
+              </a:defRPr>
+            </a:pPr>
+            <a:r>
+              <a:t>• 해결: AS-Curve 궤적 + ZVD 인풋쉐이핑으로 진동 원천 억제</a:t>
+            </a:r>
+          </a:p>
+          <a:p>
+            <a:pPr>
+              <a:spcAft>
+                <a:spcPts val="200"/>
+              </a:spcAft>
+              <a:defRPr sz="400" b="0">
+                <a:solidFill>
+                  <a:srgbClr val="1F2937"/>
+                </a:solidFill>
+              </a:defRPr>
+            </a:pPr>
+          </a:p>
+          <a:p>
+            <a:pPr>
+              <a:spcAft>
+                <a:spcPts val="200"/>
+              </a:spcAft>
+              <a:defRPr sz="1200" b="1">
+                <a:solidFill>
+                  <a:srgbClr val="1F2937"/>
+                </a:solidFill>
+              </a:defRPr>
+            </a:pPr>
+            <a:r>
+              <a:t>2. 시스템 모델</a:t>
+            </a:r>
+          </a:p>
+          <a:p>
+            <a:pPr>
+              <a:spcAft>
+                <a:spcPts val="200"/>
+              </a:spcAft>
+              <a:defRPr sz="400" b="0">
+                <a:solidFill>
+                  <a:srgbClr val="1F2937"/>
+                </a:solidFill>
+              </a:defRPr>
+            </a:pPr>
+          </a:p>
+          <a:p>
+            <a:pPr>
+              <a:spcAft>
+                <a:spcPts val="200"/>
+              </a:spcAft>
+              <a:defRPr sz="900" b="0">
+                <a:solidFill>
+                  <a:srgbClr val="1F2937"/>
+                </a:solidFill>
+              </a:defRPr>
+            </a:pPr>
+            <a:r>
+              <a:t>• 2-Mass Model: Motor(Perfect Servo) → Spring-Damper → Load</a:t>
+            </a:r>
+          </a:p>
+          <a:p>
+            <a:pPr>
+              <a:spcAft>
+                <a:spcPts val="200"/>
+              </a:spcAft>
+              <a:defRPr sz="900" b="0">
+                <a:solidFill>
+                  <a:srgbClr val="1F2937"/>
+                </a:solidFill>
+              </a:defRPr>
+            </a:pPr>
+            <a:r>
+              <a:t>• RK4 수치적분 (10x substep), dt=0.1ms, fn=10Hz, ζ=0.05</a:t>
+            </a:r>
+          </a:p>
+          <a:p>
+            <a:pPr>
+              <a:spcAft>
+                <a:spcPts val="200"/>
+              </a:spcAft>
+              <a:defRPr sz="900" b="0">
+                <a:solidFill>
+                  <a:srgbClr val="1F2937"/>
+                </a:solidFill>
+              </a:defRPr>
+            </a:pPr>
+            <a:r>
+              <a:t>• 디지털 트윈: Three.js 3D + Chart.js 실시간 시각화</a:t>
+            </a:r>
+          </a:p>
+        </p:txBody>
+      </p:sp>
+      <p:pic>
+        <p:nvPicPr>
+          <p:cNvPr id="25" name="Picture 24" descr="chart1_vibration_waveform.png"/>
+          <p:cNvPicPr>
+            <a:picLocks noChangeAspect="1"/>
+          </p:cNvPicPr>
+          <p:nvPr/>
+        </p:nvPicPr>
+        <p:blipFill>
+          <a:blip r:embed="rId3"/>
+          <a:stretch>
+            <a:fillRect/>
+          </a:stretch>
+        </p:blipFill>
+        <p:spPr>
+          <a:xfrm>
+            <a:off x="734377" y="18403443"/>
+            <a:ext cx="8078152" cy="11246548"/>
+          </a:xfrm>
+          <a:prstGeom prst="rect">
+            <a:avLst/>
+          </a:prstGeom>
+        </p:spPr>
+      </p:pic>
+      <p:pic>
+        <p:nvPicPr>
+          <p:cNvPr id="26" name="Picture 25" descr="chart5_3profile_bar.png"/>
+          <p:cNvPicPr>
+            <a:picLocks noChangeAspect="1"/>
+          </p:cNvPicPr>
+          <p:nvPr/>
+        </p:nvPicPr>
+        <p:blipFill>
+          <a:blip r:embed="rId4"/>
+          <a:stretch>
+            <a:fillRect/>
+          </a:stretch>
+        </p:blipFill>
+        <p:spPr>
+          <a:xfrm>
+            <a:off x="734377" y="30161198"/>
+            <a:ext cx="8078152" cy="9201721"/>
+          </a:xfrm>
+          <a:prstGeom prst="rect">
+            <a:avLst/>
+          </a:prstGeom>
+        </p:spPr>
+      </p:pic>
+      <p:sp>
+        <p:nvSpPr>
+          <p:cNvPr id="27" name="TextBox 26"/>
+          <p:cNvSpPr txBox="1"/>
+          <p:nvPr/>
+        </p:nvSpPr>
+        <p:spPr>
+          <a:xfrm>
+            <a:off x="9546907" y="5112067"/>
+            <a:ext cx="8078152" cy="2044827"/>
+          </a:xfrm>
+          <a:prstGeom prst="rect">
+            <a:avLst/>
+          </a:prstGeom>
+          <a:noFill/>
+        </p:spPr>
+        <p:txBody>
+          <a:bodyPr wrap="square">
+            <a:spAutoFit/>
+          </a:bodyPr>
+          <a:lstStyle/>
+          <a:p>
+            <a:pPr>
+              <a:spcAft>
+                <a:spcPts val="200"/>
+              </a:spcAft>
+              <a:defRPr sz="1200" b="1">
+                <a:solidFill>
+                  <a:srgbClr val="1F2937"/>
+                </a:solidFill>
+              </a:defRPr>
+            </a:pPr>
+            <a:r>
+              <a:t>3. 실험 결과 — 동일 조건 비교</a:t>
             </a:r>
           </a:p>
         </p:txBody>
       </p:sp>
       <p:graphicFrame>
         <p:nvGraphicFramePr>
-          <p:cNvPr id="23" name="Table 22"/>
+          <p:cNvPr id="28" name="Table 27"/>
           <p:cNvGraphicFramePr>
             <a:graphicFrameLocks noGrp="1"/>
           </p:cNvGraphicFramePr>
           <p:nvPr/>
         </p:nvGraphicFramePr>
         <p:xfrm>
-          <a:off x="1500000" y="23500000"/>
-          <a:ext cx="14000000" cy="3200000"/>
+          <a:off x="9546907" y="7668101"/>
+          <a:ext cx="8078152" cy="8179308"/>
         </p:xfrm>
         <a:graphic>
           <a:graphicData uri="http://schemas.openxmlformats.org/drawingml/2006/table">
@@ -3904,32 +4174,32 @@
                 <a:tableStyleId>{5C22544A-7EE6-4342-B048-85BDC9FD1C3A}</a:tableStyleId>
               </a:tblPr>
               <a:tblGrid>
-                <a:gridCol w="3200000"/>
-                <a:gridCol w="3600000"/>
-                <a:gridCol w="3600000"/>
-                <a:gridCol w="3600000"/>
+                <a:gridCol w="2019538"/>
+                <a:gridCol w="2019538"/>
+                <a:gridCol w="2019538"/>
+                <a:gridCol w="2019538"/>
               </a:tblGrid>
-              <a:tr h="800000">
+              <a:tr h="1635861">
                 <a:tc>
                   <a:txBody>
                     <a:bodyPr/>
                     <a:lstStyle/>
                     <a:p>
-                      <a:pPr algn="ctr"/>
-                      <a:r>
-                        <a:rPr sz="1800" b="1">
+                      <a:pPr algn="ctr">
+                        <a:defRPr sz="800" b="1">
                           <a:solidFill>
                             <a:srgbClr val="FFFFFF"/>
                           </a:solidFill>
-                          <a:latin typeface="맑은 고딕"/>
-                        </a:rPr>
-                        <a:t>구분</a:t>
+                        </a:defRPr>
+                      </a:pPr>
+                      <a:r>
+                        <a:t>지표</a:t>
                       </a:r>
                     </a:p>
                   </a:txBody>
                   <a:tcPr>
                     <a:solidFill>
-                      <a:srgbClr val="00326E"/>
+                      <a:srgbClr val="1E3A5F"/>
                     </a:solidFill>
                   </a:tcPr>
                 </a:tc>
@@ -3938,21 +4208,21 @@
                     <a:bodyPr/>
                     <a:lstStyle/>
                     <a:p>
-                      <a:pPr algn="ctr"/>
-                      <a:r>
-                        <a:rPr sz="1800" b="1">
+                      <a:pPr algn="ctr">
+                        <a:defRPr sz="800" b="1">
                           <a:solidFill>
                             <a:srgbClr val="FFFFFF"/>
                           </a:solidFill>
-                          <a:latin typeface="맑은 고딕"/>
-                        </a:rPr>
+                        </a:defRPr>
+                      </a:pPr>
+                      <a:r>
                         <a:t>Trapezoidal</a:t>
                       </a:r>
                     </a:p>
                   </a:txBody>
                   <a:tcPr>
                     <a:solidFill>
-                      <a:srgbClr val="00326E"/>
+                      <a:srgbClr val="1E3A5F"/>
                     </a:solidFill>
                   </a:tcPr>
                 </a:tc>
@@ -3961,21 +4231,21 @@
                     <a:bodyPr/>
                     <a:lstStyle/>
                     <a:p>
-                      <a:pPr algn="ctr"/>
-                      <a:r>
-                        <a:rPr sz="1800" b="1">
+                      <a:pPr algn="ctr">
+                        <a:defRPr sz="800" b="1">
                           <a:solidFill>
                             <a:srgbClr val="FFFFFF"/>
                           </a:solidFill>
-                          <a:latin typeface="맑은 고딕"/>
-                        </a:rPr>
+                        </a:defRPr>
+                      </a:pPr>
+                      <a:r>
                         <a:t>AS-Curve</a:t>
                       </a:r>
                     </a:p>
                   </a:txBody>
                   <a:tcPr>
                     <a:solidFill>
-                      <a:srgbClr val="00326E"/>
+                      <a:srgbClr val="1E3A5F"/>
                     </a:solidFill>
                   </a:tcPr>
                 </a:tc>
@@ -3984,118 +4254,159 @@
                     <a:bodyPr/>
                     <a:lstStyle/>
                     <a:p>
-                      <a:pPr algn="ctr"/>
-                      <a:r>
-                        <a:rPr sz="1800" b="1">
+                      <a:pPr algn="ctr">
+                        <a:defRPr sz="800" b="1">
                           <a:solidFill>
                             <a:srgbClr val="FFFFFF"/>
                           </a:solidFill>
-                          <a:latin typeface="맑은 고딕"/>
-                        </a:rPr>
+                        </a:defRPr>
+                      </a:pPr>
+                      <a:r>
                         <a:t>AS-Curve+ZVD</a:t>
                       </a:r>
                     </a:p>
                   </a:txBody>
                   <a:tcPr>
                     <a:solidFill>
-                      <a:srgbClr val="00326E"/>
+                      <a:srgbClr val="1E3A5F"/>
                     </a:solidFill>
                   </a:tcPr>
                 </a:tc>
               </a:tr>
-              <a:tr h="800000">
+              <a:tr h="1635861">
                 <a:tc>
                   <a:txBody>
                     <a:bodyPr/>
                     <a:lstStyle/>
                     <a:p>
-                      <a:pPr algn="ctr"/>
+                      <a:pPr algn="ctr">
+                        <a:defRPr sz="800"/>
+                      </a:pPr>
                       <a:r>
-                        <a:rPr sz="1800" b="1">
-                          <a:latin typeface="맑은 고딕"/>
-                        </a:rPr>
-                        <a:t>잔류 진동</a:t>
+                        <a:t>이동 시간</a:t>
                       </a:r>
                     </a:p>
                   </a:txBody>
-                  <a:tcPr>
-                    <a:solidFill>
-                      <a:srgbClr val="E8EEF7"/>
-                    </a:solidFill>
-                  </a:tcPr>
+                  <a:tcPr/>
                 </a:tc>
                 <a:tc>
                   <a:txBody>
                     <a:bodyPr/>
                     <a:lstStyle/>
                     <a:p>
-                      <a:pPr algn="ctr"/>
+                      <a:pPr algn="ctr">
+                        <a:defRPr sz="800"/>
+                      </a:pPr>
                       <a:r>
-                        <a:rPr sz="1800">
-                          <a:latin typeface="맑은 고딕"/>
-                        </a:rPr>
-                        <a:t>17.47mm</a:t>
+                        <a:t>0.1000s</a:t>
                       </a:r>
                     </a:p>
                   </a:txBody>
-                  <a:tcPr>
-                    <a:solidFill>
-                      <a:srgbClr val="E8EEF7"/>
-                    </a:solidFill>
-                  </a:tcPr>
+                  <a:tcPr/>
                 </a:tc>
                 <a:tc>
                   <a:txBody>
                     <a:bodyPr/>
                     <a:lstStyle/>
                     <a:p>
-                      <a:pPr algn="ctr"/>
+                      <a:pPr algn="ctr">
+                        <a:defRPr sz="800"/>
+                      </a:pPr>
                       <a:r>
-                        <a:rPr sz="1800">
-                          <a:latin typeface="맑은 고딕"/>
-                        </a:rPr>
-                        <a:t>24.66mm</a:t>
+                        <a:t>0.0950s</a:t>
                       </a:r>
                     </a:p>
                   </a:txBody>
-                  <a:tcPr>
-                    <a:solidFill>
-                      <a:srgbClr val="E8EEF7"/>
-                    </a:solidFill>
-                  </a:tcPr>
+                  <a:tcPr/>
                 </a:tc>
                 <a:tc>
                   <a:txBody>
                     <a:bodyPr/>
                     <a:lstStyle/>
                     <a:p>
-                      <a:pPr algn="ctr"/>
+                      <a:pPr algn="ctr">
+                        <a:defRPr sz="800"/>
+                      </a:pPr>
                       <a:r>
-                        <a:rPr sz="1800">
-                          <a:latin typeface="맑은 고딕"/>
-                        </a:rPr>
-                        <a:t>4.29mm</a:t>
+                        <a:t>0.0950s</a:t>
                       </a:r>
                     </a:p>
                   </a:txBody>
-                  <a:tcPr>
-                    <a:solidFill>
-                      <a:srgbClr val="E8EEF7"/>
-                    </a:solidFill>
-                  </a:tcPr>
+                  <a:tcPr/>
                 </a:tc>
               </a:tr>
-              <a:tr h="800000">
+              <a:tr h="1635861">
                 <a:tc>
                   <a:txBody>
                     <a:bodyPr/>
                     <a:lstStyle/>
                     <a:p>
-                      <a:pPr algn="ctr"/>
+                      <a:pPr algn="ctr">
+                        <a:defRPr sz="800"/>
+                      </a:pPr>
                       <a:r>
-                        <a:rPr sz="1800" b="1">
-                          <a:latin typeface="맑은 고딕"/>
-                        </a:rPr>
+                        <a:t>잔류 진동</a:t>
+                      </a:r>
+                    </a:p>
+                  </a:txBody>
+                  <a:tcPr/>
+                </a:tc>
+                <a:tc>
+                  <a:txBody>
+                    <a:bodyPr/>
+                    <a:lstStyle/>
+                    <a:p>
+                      <a:pPr algn="ctr">
+                        <a:defRPr sz="800"/>
+                      </a:pPr>
+                      <a:r>
+                        <a:t>17.47mm</a:t>
+                      </a:r>
+                    </a:p>
+                  </a:txBody>
+                  <a:tcPr/>
+                </a:tc>
+                <a:tc>
+                  <a:txBody>
+                    <a:bodyPr/>
+                    <a:lstStyle/>
+                    <a:p>
+                      <a:pPr algn="ctr">
+                        <a:defRPr sz="800"/>
+                      </a:pPr>
+                      <a:r>
+                        <a:t>24.66mm</a:t>
+                      </a:r>
+                    </a:p>
+                  </a:txBody>
+                  <a:tcPr/>
+                </a:tc>
+                <a:tc>
+                  <a:txBody>
+                    <a:bodyPr/>
+                    <a:lstStyle/>
+                    <a:p>
+                      <a:pPr algn="ctr">
+                        <a:defRPr sz="800"/>
+                      </a:pPr>
+                      <a:r>
+                        <a:t>4.29mm</a:t>
+                      </a:r>
+                    </a:p>
+                  </a:txBody>
+                  <a:tcPr/>
+                </a:tc>
+              </a:tr>
+              <a:tr h="1635861">
+                <a:tc>
+                  <a:txBody>
+                    <a:bodyPr/>
+                    <a:lstStyle/>
+                    <a:p>
+                      <a:pPr algn="ctr">
+                        <a:defRPr sz="800"/>
+                      </a:pPr>
+                      <a:r>
                         <a:t>정착 시간</a:t>
                       </a:r>
                     </a:p>
@@ -4107,11 +4418,10 @@
                     <a:bodyPr/>
                     <a:lstStyle/>
                     <a:p>
-                      <a:pPr algn="ctr"/>
+                      <a:pPr algn="ctr">
+                        <a:defRPr sz="800"/>
+                      </a:pPr>
                       <a:r>
-                        <a:rPr sz="1800">
-                          <a:latin typeface="맑은 고딕"/>
-                        </a:rPr>
                         <a:t>2.660s</a:t>
                       </a:r>
                     </a:p>
@@ -4123,11 +4433,10 @@
                     <a:bodyPr/>
                     <a:lstStyle/>
                     <a:p>
-                      <a:pPr algn="ctr"/>
+                      <a:pPr algn="ctr">
+                        <a:defRPr sz="800"/>
+                      </a:pPr>
                       <a:r>
-                        <a:rPr sz="1800">
-                          <a:latin typeface="맑은 고딕"/>
-                        </a:rPr>
                         <a:t>2.815s</a:t>
                       </a:r>
                     </a:p>
@@ -4139,11 +4448,10 @@
                     <a:bodyPr/>
                     <a:lstStyle/>
                     <a:p>
-                      <a:pPr algn="ctr"/>
+                      <a:pPr algn="ctr">
+                        <a:defRPr sz="800"/>
+                      </a:pPr>
                       <a:r>
-                        <a:rPr sz="1800">
-                          <a:latin typeface="맑은 고딕"/>
-                        </a:rPr>
                         <a:t>0.197s</a:t>
                       </a:r>
                     </a:p>
@@ -4151,102 +4459,130 @@
                   <a:tcPr/>
                 </a:tc>
               </a:tr>
-              <a:tr h="800000">
+              <a:tr h="1635864">
                 <a:tc>
                   <a:txBody>
                     <a:bodyPr/>
                     <a:lstStyle/>
                     <a:p>
-                      <a:pPr algn="ctr"/>
+                      <a:pPr algn="ctr">
+                        <a:defRPr sz="800"/>
+                      </a:pPr>
                       <a:r>
-                        <a:rPr sz="1800" b="1">
-                          <a:latin typeface="맑은 고딕"/>
-                        </a:rPr>
                         <a:t>UPH</a:t>
                       </a:r>
                     </a:p>
                   </a:txBody>
-                  <a:tcPr>
-                    <a:solidFill>
-                      <a:srgbClr val="E8EEF7"/>
-                    </a:solidFill>
-                  </a:tcPr>
+                  <a:tcPr/>
                 </a:tc>
                 <a:tc>
                   <a:txBody>
                     <a:bodyPr/>
                     <a:lstStyle/>
                     <a:p>
-                      <a:pPr algn="ctr"/>
+                      <a:pPr algn="ctr">
+                        <a:defRPr sz="800"/>
+                      </a:pPr>
                       <a:r>
-                        <a:rPr sz="1800">
-                          <a:latin typeface="맑은 고딕"/>
-                        </a:rPr>
                         <a:t>676</a:t>
                       </a:r>
                     </a:p>
                   </a:txBody>
-                  <a:tcPr>
-                    <a:solidFill>
-                      <a:srgbClr val="E8EEF7"/>
-                    </a:solidFill>
-                  </a:tcPr>
+                  <a:tcPr/>
                 </a:tc>
                 <a:tc>
                   <a:txBody>
                     <a:bodyPr/>
                     <a:lstStyle/>
                     <a:p>
-                      <a:pPr algn="ctr"/>
+                      <a:pPr algn="ctr">
+                        <a:defRPr sz="800"/>
+                      </a:pPr>
                       <a:r>
-                        <a:rPr sz="1800">
-                          <a:latin typeface="맑은 고딕"/>
-                        </a:rPr>
                         <a:t>639</a:t>
                       </a:r>
                     </a:p>
                   </a:txBody>
-                  <a:tcPr>
-                    <a:solidFill>
-                      <a:srgbClr val="E8EEF7"/>
-                    </a:solidFill>
-                  </a:tcPr>
+                  <a:tcPr/>
                 </a:tc>
                 <a:tc>
                   <a:txBody>
                     <a:bodyPr/>
                     <a:lstStyle/>
                     <a:p>
-                      <a:pPr algn="ctr"/>
+                      <a:pPr algn="ctr">
+                        <a:defRPr sz="800"/>
+                      </a:pPr>
                       <a:r>
-                        <a:rPr sz="1800">
-                          <a:latin typeface="맑은 고딕"/>
-                        </a:rPr>
                         <a:t>9,137</a:t>
                       </a:r>
                     </a:p>
                   </a:txBody>
-                  <a:tcPr>
-                    <a:solidFill>
-                      <a:srgbClr val="E8EEF7"/>
-                    </a:solidFill>
-                  </a:tcPr>
+                  <a:tcPr/>
                 </a:tc>
               </a:tr>
             </a:tbl>
           </a:graphicData>
         </a:graphic>
       </p:graphicFrame>
-      <p:sp>
-        <p:nvSpPr>
-          <p:cNvPr id="24" name="TextBox 23"/>
+      <p:pic>
+        <p:nvPicPr>
+          <p:cNvPr id="29" name="Picture 28" descr="chart3_sensitivity.png"/>
+          <p:cNvPicPr>
+            <a:picLocks noChangeAspect="1"/>
+          </p:cNvPicPr>
+          <p:nvPr/>
+        </p:nvPicPr>
+        <p:blipFill>
+          <a:blip r:embed="rId5"/>
+          <a:stretch>
+            <a:fillRect/>
+          </a:stretch>
+        </p:blipFill>
+        <p:spPr>
+          <a:xfrm>
+            <a:off x="9546907" y="16358616"/>
+            <a:ext cx="8078152" cy="10224135"/>
+          </a:xfrm>
+          <a:prstGeom prst="rect">
+            <a:avLst/>
+          </a:prstGeom>
+        </p:spPr>
+      </p:pic>
+      <p:pic>
+        <p:nvPicPr>
+          <p:cNvPr id="30" name="Picture 29" descr="chart2_uph_vs_speed.png"/>
+          <p:cNvPicPr>
+            <a:picLocks noChangeAspect="1"/>
+          </p:cNvPicPr>
+          <p:nvPr/>
+        </p:nvPicPr>
+        <p:blipFill>
+          <a:blip r:embed="rId6"/>
+          <a:stretch>
+            <a:fillRect/>
+          </a:stretch>
+        </p:blipFill>
+        <p:spPr>
+          <a:xfrm>
+            <a:off x="9546907" y="27093957"/>
+            <a:ext cx="8078152" cy="10224135"/>
+          </a:xfrm>
+          <a:prstGeom prst="rect">
+            <a:avLst/>
+          </a:prstGeom>
+        </p:spPr>
+      </p:pic>
+      <p:sp>
+        <p:nvSpPr>
+          <p:cNvPr id="31" name="TextBox 30"/>
           <p:cNvSpPr txBox="1"/>
           <p:nvPr/>
         </p:nvSpPr>
         <p:spPr>
           <a:xfrm>
-            <a:off x="500000" y="33200000"/>
-            <a:ext cx="17200000" cy="8000000"/>
+            <a:off x="734377" y="39874126"/>
+            <a:ext cx="16890682" cy="10224135"/>
           </a:xfrm>
           <a:prstGeom prst="rect">
             <a:avLst/>
@@ -4259,113 +4595,75 @@
           </a:bodyPr>
           <a:lstStyle/>
           <a:p>
-            <a:r>
-              <a:rPr sz="1800" b="1">
+            <a:pPr>
+              <a:spcAft>
+                <a:spcPts val="200"/>
+              </a:spcAft>
+              <a:defRPr sz="1200" b="1">
                 <a:solidFill>
-                  <a:srgbClr val="00326E"/>
+                  <a:srgbClr val="1F2937"/>
                 </a:solidFill>
-                <a:latin typeface="맑은 고딕"/>
-              </a:rPr>
-              <a:t>■ 4. 핵심 성과</a:t>
-            </a:r>
-          </a:p>
-          <a:p>
-            <a:r>
-              <a:rPr sz="1400" b="0">
-                <a:latin typeface="맑은 고딕"/>
-              </a:rPr>
-              <a:t/>
-            </a:r>
-          </a:p>
-          <a:p>
-            <a:r>
-              <a:rPr sz="1600" b="0">
-                <a:latin typeface="맑은 고딕"/>
-              </a:rPr>
-              <a:t>• 잔류 진동 75.4% 감소 (17.47mm → 4.29mm)</a:t>
-            </a:r>
-          </a:p>
-          <a:p>
-            <a:r>
-              <a:rPr sz="1600" b="0">
-                <a:latin typeface="맑은 고딕"/>
-              </a:rPr>
-              <a:t>• 정착 시간 92.6% 단축 (2.660s → 0.197s)</a:t>
-            </a:r>
-          </a:p>
-          <a:p>
-            <a:r>
-              <a:rPr sz="1600" b="0">
-                <a:latin typeface="맑은 고딕"/>
-              </a:rPr>
-              <a:t>• UPH 1,252% 향상 (676 → 9,137)</a:t>
-            </a:r>
-          </a:p>
-          <a:p>
-            <a:r>
-              <a:rPr sz="1400" b="0">
-                <a:latin typeface="맑은 고딕"/>
-              </a:rPr>
-              <a:t/>
-            </a:r>
-          </a:p>
-          <a:p>
-            <a:r>
-              <a:rPr sz="1400" b="0">
-                <a:latin typeface="맑은 고딕"/>
-              </a:rPr>
-              <a:t/>
-            </a:r>
-          </a:p>
-          <a:p>
-            <a:r>
-              <a:rPr sz="1800" b="1">
+              </a:defRPr>
+            </a:pPr>
+            <a:r>
+              <a:t>4. 핵심 성과 및 결론</a:t>
+            </a:r>
+          </a:p>
+          <a:p>
+            <a:pPr>
+              <a:spcAft>
+                <a:spcPts val="200"/>
+              </a:spcAft>
+              <a:defRPr sz="400" b="0">
                 <a:solidFill>
-                  <a:srgbClr val="00326E"/>
+                  <a:srgbClr val="1F2937"/>
                 </a:solidFill>
-                <a:latin typeface="맑은 고딕"/>
-              </a:rPr>
-              <a:t>■ 5. 결론 및 향후 과제</a:t>
-            </a:r>
-          </a:p>
-          <a:p>
-            <a:r>
-              <a:rPr sz="1400" b="0">
-                <a:latin typeface="맑은 고딕"/>
-              </a:rPr>
-              <a:t/>
-            </a:r>
-          </a:p>
-          <a:p>
-            <a:r>
-              <a:rPr sz="1600" b="0">
-                <a:latin typeface="맑은 고딕"/>
-              </a:rPr>
-              <a:t>• ZVD 인풋쉐이핑은 약 100ms의 지연으로 2.5초의 진동 대기를 제거</a:t>
-            </a:r>
-          </a:p>
-          <a:p>
-            <a:r>
-              <a:rPr sz="1600" b="0">
-                <a:latin typeface="맑은 고딕"/>
-              </a:rPr>
-              <a:t>• 비대칭 S-Curve + ZVD 조합으로 최적의 진동 억제 성능 달성</a:t>
-            </a:r>
-          </a:p>
-          <a:p>
-            <a:r>
-              <a:rPr sz="1600" b="0">
-                <a:latin typeface="맑은 고딕"/>
-              </a:rPr>
-              <a:t>• 향후 실물 하드웨어(STM32 + IMU) 검증 필요</a:t>
-            </a:r>
-          </a:p>
-          <a:p>
-            <a:r>
-              <a:rPr sz="1600" b="0">
-                <a:latin typeface="맑은 고딕"/>
-              </a:rPr>
-              <a:t>• PSO 알고리즘을 통한 파라미터 자동 최적화 고도화 계획</a:t>
+              </a:defRPr>
+            </a:pPr>
+          </a:p>
+          <a:p>
+            <a:pPr>
+              <a:spcAft>
+                <a:spcPts val="200"/>
+              </a:spcAft>
+              <a:defRPr sz="1000" b="0">
+                <a:solidFill>
+                  <a:srgbClr val="1F2937"/>
+                </a:solidFill>
+              </a:defRPr>
+            </a:pPr>
+            <a:r>
+              <a:t>• 잔류 진동 75.4% 감소 | 정착 시간 92.6% 단축 (2.660s → 0.197s) | UPH 1,252% 향상 (676 → 9,137)</a:t>
+            </a:r>
+          </a:p>
+          <a:p>
+            <a:pPr>
+              <a:spcAft>
+                <a:spcPts val="200"/>
+              </a:spcAft>
+              <a:defRPr sz="1000" b="0">
+                <a:solidFill>
+                  <a:srgbClr val="1F2937"/>
+                </a:solidFill>
+              </a:defRPr>
+            </a:pPr>
+            <a:r>
+              <a:t>• ZVD 인풋쉐이핑: 약 100ms의 명령 지연으로 2.5초의 진동 대기 시간을 제거 — 투자 대비 25배 시간 절약</a:t>
+            </a:r>
+          </a:p>
+          <a:p>
+            <a:pPr>
+              <a:spcAft>
+                <a:spcPts val="200"/>
+              </a:spcAft>
+              <a:defRPr sz="1000" b="0">
+                <a:solidFill>
+                  <a:srgbClr val="1F2937"/>
+                </a:solidFill>
+              </a:defRPr>
+            </a:pPr>
+            <a:r>
+              <a:t>• 한계: Perfect Servo 가정, 단일 축 모델 | 향후: STM32 + MPU6050 IMU 실물 하드웨어 검증</a:t>
             </a:r>
           </a:p>
         </p:txBody>
